--- a/docs/Gujarat_CCTV_Hybrid_Team_Plan.pptx
+++ b/docs/Gujarat_CCTV_Hybrid_Team_Plan.pptx
@@ -11474,7 +11474,7 @@
                   <a:srgbClr val="131820"/>
                 </a:solidFill>
               </a:rPr>
-              <a:t>50 cameras × 2 analysis FPS = 100 FPS; do not promise one GPU can handle it.</a:t>
+              <a:t>2 FPS is a hypothesis. Calibrate from dwell time and passage recall; do not promise one GPU.</a:t>
             </a:r>
           </a:p>
         </p:txBody>
@@ -12378,7 +12378,7 @@
                   <a:srgbClr val="56616E"/>
                 </a:solidFill>
               </a:rPr>
-              <a:t>Illustrative 14-day prototype scenario, not a market quote; replace rates with approved quotes.</a:t>
+              <a:t>Illustrative 14-day cost arithmetic, not the four-day build; replace rates with approved quotes.</a:t>
             </a:r>
           </a:p>
         </p:txBody>
@@ -13781,7 +13781,7 @@
                   <a:srgbClr val="131820"/>
                 </a:solidFill>
               </a:rPr>
-              <a:t>A 14-day plan for four contributors</a:t>
+              <a:t>A 4-day solo P0, code by Grok or Codex</a:t>
             </a:r>
           </a:p>
         </p:txBody>
@@ -13832,7 +13832,7 @@
                   <a:srgbClr val="56616E"/>
                 </a:solidFill>
               </a:rPr>
-              <a:t>Planning scenario: four experienced contributors at ~4–5 focused hours/day; access available on day 1.</a:t>
+              <a:t>One person. Sequence workstreams. Compress original Days 1-3 into the first two days.</a:t>
             </a:r>
           </a:p>
         </p:txBody>
@@ -14015,7 +14015,7 @@
                   <a:srgbClr val="1764C0"/>
                 </a:solidFill>
               </a:rPr>
-              <a:t>DAYS 1–3</a:t>
+              <a:t>DAYS 1-2</a:t>
             </a:r>
           </a:p>
         </p:txBody>
@@ -14096,7 +14096,7 @@
                   <a:srgbClr val="131820"/>
                 </a:solidFill>
               </a:rPr>
-              <a:t>Verify feeds and GPU</a:t>
+              <a:t>Escalate government-feed access</a:t>
             </a:r>
           </a:p>
           <a:p xmlns:a="http://schemas.openxmlformats.org/drawingml/2006/main">
@@ -14130,7 +14130,7 @@
                   <a:srgbClr val="131820"/>
                 </a:solidFill>
               </a:rPr>
-              <a:t>Connect two source types</a:t>
+              <a:t>Ledger all accessible cameras</a:t>
             </a:r>
           </a:p>
           <a:p xmlns:a="http://schemas.openxmlformats.org/drawingml/2006/main">
@@ -14147,7 +14147,7 @@
                   <a:srgbClr val="131820"/>
                 </a:solidFill>
               </a:rPr>
-              <a:t>First real alert + GIS point</a:t>
+              <a:t>First real sighting + alert + GIS</a:t>
             </a:r>
           </a:p>
         </p:txBody>
@@ -14198,7 +14198,7 @@
                   <a:srgbClr val="1764C0"/>
                 </a:solidFill>
               </a:rPr>
-              <a:t>DAYS 4–8</a:t>
+              <a:t>DAY 3</a:t>
             </a:r>
           </a:p>
         </p:txBody>
@@ -14279,7 +14279,7 @@
                   <a:srgbClr val="131820"/>
                 </a:solidFill>
               </a:rPr>
-              <a:t>Expand toward ~50 feeds</a:t>
+              <a:t>Expand analytics toward ~50</a:t>
             </a:r>
           </a:p>
           <a:p xmlns:a="http://schemas.openxmlformats.org/drawingml/2006/main">
@@ -14296,7 +14296,7 @@
                   <a:srgbClr val="131820"/>
                 </a:solidFill>
               </a:rPr>
-              <a:t>Tune ANPR on validation set</a:t>
+              <a:t>Calibrate sampling from dwell time</a:t>
             </a:r>
           </a:p>
           <a:p xmlns:a="http://schemas.openxmlformats.org/drawingml/2006/main">
@@ -14313,7 +14313,7 @@
                   <a:srgbClr val="131820"/>
                 </a:solidFill>
               </a:rPr>
-              <a:t>Finish watchlist + history</a:t>
+              <a:t>Watchlist + evidence + history</a:t>
             </a:r>
           </a:p>
           <a:p xmlns:a="http://schemas.openxmlformats.org/drawingml/2006/main">
@@ -14330,7 +14330,7 @@
                   <a:srgbClr val="131820"/>
                 </a:solidFill>
               </a:rPr>
-              <a:t>Add roles, audit and evidence</a:t>
+              <a:t>Disclose actual analytics coverage</a:t>
             </a:r>
           </a:p>
         </p:txBody>
@@ -14381,7 +14381,7 @@
                   <a:srgbClr val="1764C0"/>
                 </a:solidFill>
               </a:rPr>
-              <a:t>DAYS 9–14</a:t>
+              <a:t>DAY 4</a:t>
             </a:r>
           </a:p>
         </p:txBody>
@@ -14462,7 +14462,7 @@
                   <a:srgbClr val="131820"/>
                 </a:solidFill>
               </a:rPr>
-              <a:t>Freeze quality configuration</a:t>
+              <a:t>Feature freeze at midday</a:t>
             </a:r>
           </a:p>
           <a:p xmlns:a="http://schemas.openxmlformats.org/drawingml/2006/main">
@@ -14479,7 +14479,7 @@
                   <a:srgbClr val="131820"/>
                 </a:solidFill>
               </a:rPr>
-              <a:t>Run load + outage tests</a:t>
+              <a:t>Record both required demos</a:t>
             </a:r>
           </a:p>
           <a:p xmlns:a="http://schemas.openxmlformats.org/drawingml/2006/main">
@@ -14496,7 +14496,7 @@
                   <a:srgbClr val="131820"/>
                 </a:solidFill>
               </a:rPr>
-              <a:t>Record both demos</a:t>
+              <a:t>Finish HLD, report and links</a:t>
             </a:r>
           </a:p>
           <a:p xmlns:a="http://schemas.openxmlformats.org/drawingml/2006/main">
@@ -14513,7 +14513,7 @@
                   <a:srgbClr val="131820"/>
                 </a:solidFill>
               </a:rPr>
-              <a:t>Finish HLD, report and links</a:t>
+              <a:t>No new features after midday</a:t>
             </a:r>
           </a:p>
         </p:txBody>
@@ -14644,7 +14644,7 @@
                   <a:srgbClr val="131820"/>
                 </a:solidFill>
               </a:rPr>
-              <a:t>Parallel work needs one clear owner</a:t>
+              <a:t>Sequence four workstreams as one person</a:t>
             </a:r>
           </a:p>
         </p:txBody>
@@ -14695,7 +14695,7 @@
                   <a:srgbClr val="56616E"/>
                 </a:solidFill>
               </a:rPr>
-              <a:t>Proposed roles, not assigned people. Each task has one accountable owner and a defined handoff.</a:t>
+              <a:t>Grok/Codex generates each module. The human owns access, gates and demos.</a:t>
             </a:r>
           </a:p>
         </p:txBody>
@@ -14863,7 +14863,7 @@
                             <a:srgbClr val="131820"/>
                           </a:solidFill>
                         </a:rPr>
-                        <a:t>Owner</a:t>
+                        <a:t>Stream</a:t>
                       </a:r>
                     </a:p>
                   </a:txBody>
@@ -14884,7 +14884,7 @@
                             <a:srgbClr val="131820"/>
                           </a:solidFill>
                         </a:rPr>
-                        <a:t>Can build independently</a:t>
+                        <a:t>Model generates</a:t>
                       </a:r>
                     </a:p>
                   </a:txBody>
@@ -14970,7 +14970,7 @@
                             <a:srgbClr val="131820"/>
                           </a:solidFill>
                         </a:rPr>
-                        <a:t>Stream/camera contract; two real sources work</a:t>
+                        <a:t>Stream/camera contract; all accessible cameras in ledger</a:t>
                       </a:r>
                     </a:p>
                   </a:txBody>
@@ -15697,7 +15697,7 @@
                             <a:srgbClr val="131820"/>
                           </a:solidFill>
                         </a:rPr>
-                        <a:t>Two source types; actual plate and evidence</a:t>
+                        <a:t>Ledger of accessible cameras; actual plate and evidence</a:t>
                       </a:r>
                     </a:p>
                   </a:txBody>
@@ -16033,7 +16033,7 @@
                   <a:srgbClr val="131820"/>
                 </a:solidFill>
               </a:rPr>
-              <a:t>One person can build a narrower version</a:t>
+              <a:t>Solo 4-day build with Grok or Codex</a:t>
             </a:r>
           </a:p>
         </p:txBody>
@@ -16084,7 +16084,7 @@
                   <a:srgbClr val="56616E"/>
                 </a:solidFill>
               </a:rPr>
-              <a:t>Solo scenario: approximately 5–7 weeks at ~35 focused hours/week; feed and hardware access are prerequisites.</a:t>
+              <a:t>Not 5-7 weeks. One person plus generated code; feed access is still the blocker.</a:t>
             </a:r>
           </a:p>
         </p:txBody>
@@ -16267,7 +16267,7 @@
                   <a:srgbClr val="1764C0"/>
                 </a:solidFill>
               </a:rPr>
-              <a:t>WEEKS 1–2</a:t>
+              <a:t>DAYS 1-2</a:t>
             </a:r>
           </a:p>
         </p:txBody>
@@ -16348,7 +16348,7 @@
                   <a:srgbClr val="131820"/>
                 </a:solidFill>
               </a:rPr>
-              <a:t>Registry + first source</a:t>
+              <a:t>Registry + own-feed</a:t>
             </a:r>
           </a:p>
           <a:p xmlns:a="http://schemas.openxmlformats.org/drawingml/2006/main">
@@ -16365,7 +16365,7 @@
                   <a:srgbClr val="131820"/>
                 </a:solidFill>
               </a:rPr>
-              <a:t>Baseline ANPR</a:t>
+              <a:t>Persistent sighting</a:t>
             </a:r>
           </a:p>
           <a:p xmlns:a="http://schemas.openxmlformats.org/drawingml/2006/main">
@@ -16382,7 +16382,7 @@
                   <a:srgbClr val="131820"/>
                 </a:solidFill>
               </a:rPr>
-              <a:t>One actual alert</a:t>
+              <a:t>Exact watchlist alert</a:t>
             </a:r>
           </a:p>
           <a:p xmlns:a="http://schemas.openxmlformats.org/drawingml/2006/main">
@@ -16399,7 +16399,7 @@
                   <a:srgbClr val="131820"/>
                 </a:solidFill>
               </a:rPr>
-              <a:t>Two integration paths</a:t>
+              <a:t>GIS inferred path</a:t>
             </a:r>
           </a:p>
         </p:txBody>
@@ -16450,7 +16450,7 @@
                   <a:srgbClr val="1764C0"/>
                 </a:solidFill>
               </a:rPr>
-              <a:t>WEEKS 3–4</a:t>
+              <a:t>DAY 3</a:t>
             </a:r>
           </a:p>
         </p:txBody>
@@ -16531,7 +16531,7 @@
                   <a:srgbClr val="131820"/>
                 </a:solidFill>
               </a:rPr>
-              <a:t>Expand to required feeds</a:t>
+              <a:t>Ledger all ~50 cameras</a:t>
             </a:r>
           </a:p>
           <a:p xmlns:a="http://schemas.openxmlformats.org/drawingml/2006/main">
@@ -16548,7 +16548,7 @@
                   <a:srgbClr val="131820"/>
                 </a:solidFill>
               </a:rPr>
-              <a:t>GIS, search and evidence</a:t>
+              <a:t>Calibrate sampling</a:t>
             </a:r>
           </a:p>
           <a:p xmlns:a="http://schemas.openxmlformats.org/drawingml/2006/main">
@@ -16565,7 +16565,7 @@
                   <a:srgbClr val="131820"/>
                 </a:solidFill>
               </a:rPr>
-              <a:t>Roles, audit and reliability</a:t>
+              <a:t>Disclose analytics coverage</a:t>
             </a:r>
           </a:p>
           <a:p xmlns:a="http://schemas.openxmlformats.org/drawingml/2006/main">
@@ -16582,7 +16582,7 @@
                   <a:srgbClr val="131820"/>
                 </a:solidFill>
               </a:rPr>
-              <a:t>Held-out quality evaluation</a:t>
+              <a:t>Government-feed if decoded</a:t>
             </a:r>
           </a:p>
         </p:txBody>
@@ -16633,7 +16633,7 @@
                   <a:srgbClr val="1764C0"/>
                 </a:solidFill>
               </a:rPr>
-              <a:t>WEEKS 5–7</a:t>
+              <a:t>DAY 4</a:t>
             </a:r>
           </a:p>
         </p:txBody>
@@ -16714,7 +16714,7 @@
                   <a:srgbClr val="131820"/>
                 </a:solidFill>
               </a:rPr>
-              <a:t>Performance and recovery</a:t>
+              <a:t>Feature freeze midday</a:t>
             </a:r>
           </a:p>
           <a:p xmlns:a="http://schemas.openxmlformats.org/drawingml/2006/main">
@@ -16731,7 +16731,7 @@
                   <a:srgbClr val="131820"/>
                 </a:solidFill>
               </a:rPr>
-              <a:t>Fix the largest failure modes</a:t>
+              <a:t>Record both demos</a:t>
             </a:r>
           </a:p>
           <a:p xmlns:a="http://schemas.openxmlformats.org/drawingml/2006/main">
@@ -16748,7 +16748,7 @@
                   <a:srgbClr val="131820"/>
                 </a:solidFill>
               </a:rPr>
-              <a:t>HLD, reports and videos</a:t>
+              <a:t>HLD, report, links</a:t>
             </a:r>
           </a:p>
           <a:p xmlns:a="http://schemas.openxmlformats.org/drawingml/2006/main">
@@ -16765,7 +16765,7 @@
                   <a:srgbClr val="131820"/>
                 </a:solidFill>
               </a:rPr>
-              <a:t>Independent review + buffer</a:t>
+              <a:t>No new features after midday</a:t>
             </a:r>
           </a:p>
         </p:txBody>
@@ -17130,7 +17130,7 @@
                   <a:srgbClr val="131820"/>
                 </a:solidFill>
               </a:rPr>
-              <a:t>First 72-hour checkpoints</a:t>
+              <a:t>Hard 4-day checkpoints</a:t>
             </a:r>
           </a:p>
         </p:txBody>
@@ -17181,7 +17181,7 @@
                   <a:srgbClr val="131820"/>
                 </a:solidFill>
               </a:rPr>
-              <a:t>Day 1: authorised feed decodes on the actual deployment host.</a:t>
+              <a:t>Midday D1: no government feed. Escalate access immediately.</a:t>
             </a:r>
           </a:p>
         </p:txBody>
@@ -17232,7 +17232,7 @@
                   <a:srgbClr val="131820"/>
                 </a:solidFill>
               </a:rPr>
-              <a:t>Day 2: a real readable plate becomes a persistent sighting.</a:t>
+              <a:t>End D1: no persistent sighting. Stop UI and infrastructure.</a:t>
             </a:r>
           </a:p>
         </p:txBody>
@@ -17283,7 +17283,7 @@
                   <a:srgbClr val="131820"/>
                 </a:solidFill>
               </a:rPr>
-              <a:t>Day 3: watchlist alert, evidence and GIS work together end to end.</a:t>
+              <a:t>Midday D2: no end-to-end alert. Drop fuzzy, tracking, bonus.</a:t>
             </a:r>
           </a:p>
         </p:txBody>
@@ -17334,7 +17334,7 @@
                   <a:srgbClr val="131820"/>
                 </a:solidFill>
               </a:rPr>
-              <a:t>Fallback rules</a:t>
+              <a:t>Scope cuts</a:t>
             </a:r>
           </a:p>
         </p:txBody>
@@ -17385,7 +17385,7 @@
                   <a:srgbClr val="131820"/>
                 </a:solidFill>
               </a:rPr>
-              <a:t>No government feed: continue own-feed work, but mark the official test blocked.</a:t>
+              <a:t>Midday D3: no stable concurrency. Lower sampling; disclose coverage.</a:t>
             </a:r>
           </a:p>
         </p:txBody>
@@ -17436,7 +17436,7 @@
                   <a:srgbClr val="131820"/>
                 </a:solidFill>
               </a:rPr>
-              <a:t>Poor plates: measure readability; adjust permitted settings before retraining.</a:t>
+              <a:t>After D4 midday: no new features.</a:t>
             </a:r>
           </a:p>
         </p:txBody>
@@ -17487,7 +17487,7 @@
                   <a:srgbClr val="131820"/>
                 </a:solidFill>
               </a:rPr>
-              <a:t>Compute limits: benchmark sampling; remove bonus work, not required coverage.</a:t>
+              <a:t>Day-1 question is feed access, not model selection.</a:t>
             </a:r>
           </a:p>
         </p:txBody>
@@ -20713,7 +20713,7 @@
                   <a:srgbClr val="56616E"/>
                 </a:solidFill>
               </a:rPr>
-              <a:t>Team decisions for the kickoff: scope, owners, access and acceptance gates.</a:t>
+              <a:t>Solo kickoff: scope, Grok/Codex codegen, access and gates.</a:t>
             </a:r>
           </a:p>
         </p:txBody>
@@ -20998,7 +20998,7 @@
                   <a:srgbClr val="131820"/>
                 </a:solidFill>
               </a:rPr>
-              <a:t>Choose the team or solo schedule; assign one owner per workstream.</a:t>
+              <a:t>Lock the solo 4-day P0; Grok or Codex writes all application code.</a:t>
             </a:r>
           </a:p>
         </p:txBody>
@@ -21202,7 +21202,7 @@
                   <a:srgbClr val="131820"/>
                 </a:solidFill>
               </a:rPr>
-              <a:t>Make two actual source paths feed the same alert and GIS workflow.</a:t>
+              <a:t>Put all accessible cameras in the ledger; report actual analytics coverage.</a:t>
             </a:r>
           </a:p>
         </p:txBody>
